--- a/CP2/CP2_U20_SORA_Iulian-Gabriel.pptx
+++ b/CP2/CP2_U20_SORA_Iulian-Gabriel.pptx
@@ -1621,11 +1621,10 @@
             <a:endParaRPr lang="ro-RO" sz="1100" noProof="0" dirty="0"/>
           </a:p>
           <a:p>
-            <a:pPr marL="0" indent="0">
+            <a:pPr>
               <a:spcAft>
                 <a:spcPts val="500"/>
               </a:spcAft>
-              <a:buNone/>
             </a:pPr>
             <a:r>
               <a:rPr lang="ro-RO" sz="1050" noProof="0" dirty="0">
@@ -1633,7 +1632,47 @@
                   <a:srgbClr val="6B7684"/>
                 </a:solidFill>
               </a:rPr>
-              <a:t>Făcut de la CP1: Am extras d = 8 trăsături derivate (multimodale, de ritm și de densitate) din matricea aliniată X (n = 15.900 observații = 3.180 UAT-uri × 5 epoci).</a:t>
+              <a:t>Făcut de la CP1: Am extras d = 8 trăsături derivate (multimodale, de ritm și densitate) în matricea aliniată X (n = </a:t>
+            </a:r>
+            <a:r>
+              <a:rPr lang="ro-RO" sz="1050" dirty="0">
+                <a:solidFill>
+                  <a:srgbClr val="6B7684"/>
+                </a:solidFill>
+              </a:rPr>
+              <a:t>15.900 observații × </a:t>
+            </a:r>
+            <a:r>
+              <a:rPr lang="ro-RO" sz="1050" noProof="0" dirty="0">
+                <a:solidFill>
+                  <a:srgbClr val="6B7684"/>
+                </a:solidFill>
+              </a:rPr>
+              <a:t>8 trăsături, reprezentând 3.180 </a:t>
+            </a:r>
+            <a:r>
+              <a:rPr lang="ro-RO" sz="1050" dirty="0">
+                <a:solidFill>
+                  <a:srgbClr val="6B7684"/>
+                </a:solidFill>
+              </a:rPr>
+              <a:t>UAT-uri × </a:t>
+            </a:r>
+            <a:r>
+              <a:rPr lang="ro-RO" sz="1050" noProof="0">
+                <a:solidFill>
+                  <a:srgbClr val="6B7684"/>
+                </a:solidFill>
+              </a:rPr>
+              <a:t>5 </a:t>
+            </a:r>
+            <a:r>
+              <a:rPr lang="ro-RO" sz="1050" noProof="0" dirty="0">
+                <a:solidFill>
+                  <a:srgbClr val="6B7684"/>
+                </a:solidFill>
+              </a:rPr>
+              <a:t>epoci).</a:t>
             </a:r>
           </a:p>
           <a:p>
@@ -1831,8 +1870,8 @@
           </a:p>
         </p:txBody>
       </p:sp>
-      <mc:AlternateContent xmlns:mc="http://schemas.openxmlformats.org/markup-compatibility/2006">
-        <mc:Choice xmlns:a14="http://schemas.microsoft.com/office/drawing/2010/main" Requires="a14">
+      <mc:AlternateContent xmlns:mc="http://schemas.openxmlformats.org/markup-compatibility/2006" xmlns:a14="http://schemas.microsoft.com/office/drawing/2010/main">
+        <mc:Choice Requires="a14">
           <p:sp>
             <p:nvSpPr>
               <p:cNvPr id="3" name="Text 1"/>
@@ -1861,15 +1900,21 @@
                 <a14:m>
                   <m:oMath xmlns:m="http://schemas.openxmlformats.org/officeDocument/2006/math">
                     <m:r>
-                      <a:rPr lang="ro-RO" i="1" noProof="0"/>
+                      <a:rPr lang="ro-RO" i="1" noProof="0">
+                        <a:latin typeface="Cambria Math" panose="02040503050406030204" pitchFamily="18" charset="0"/>
+                      </a:rPr>
                       <m:t>𝑈𝐴𝑇</m:t>
                     </m:r>
                     <m:r>
-                      <a:rPr lang="ro-RO" noProof="0"/>
+                      <a:rPr lang="ro-RO" noProof="0">
+                        <a:latin typeface="Cambria Math" panose="02040503050406030204" pitchFamily="18" charset="0"/>
+                      </a:rPr>
                       <m:t>×</m:t>
                     </m:r>
                     <m:r>
-                      <a:rPr lang="ro-RO" i="1" noProof="0"/>
+                      <a:rPr lang="ro-RO" i="1" noProof="0">
+                        <a:latin typeface="Cambria Math" panose="02040503050406030204" pitchFamily="18" charset="0"/>
+                      </a:rPr>
                       <m:t>𝑎𝑛</m:t>
                     </m:r>
                   </m:oMath>
@@ -1883,7 +1928,7 @@
             </p:txBody>
           </p:sp>
         </mc:Choice>
-        <mc:Fallback>
+        <mc:Fallback xmlns="">
           <p:sp>
             <p:nvSpPr>
               <p:cNvPr id="3" name="Text 1"/>
